--- a/doc/particle_in_cell1.pptx
+++ b/doc/particle_in_cell1.pptx
@@ -5851,7 +5851,7 @@
         <p:spPr>
           <a:xfrm>
             <a:off x="658639" y="1009020"/>
-            <a:ext cx="10087823" cy="646331"/>
+            <a:ext cx="10087823" cy="645160"/>
           </a:xfrm>
           <a:prstGeom prst="rect">
             <a:avLst/>
@@ -5899,7 +5899,7 @@
                 <a:ea typeface="宋体" panose="02010600030101010101" pitchFamily="2" charset="-122"/>
                 <a:cs typeface="Times New Roman" panose="02020603050405020304" pitchFamily="18" charset="0"/>
               </a:rPr>
-              <a:t>20*20</a:t>
+              <a:t>100*100</a:t>
             </a:r>
             <a:r>
               <a:rPr lang="zh-CN" altLang="zh-CN" sz="1800" kern="100" dirty="0">
@@ -5917,7 +5917,7 @@
                 <a:ea typeface="宋体" panose="02010600030101010101" pitchFamily="2" charset="-122"/>
                 <a:cs typeface="Times New Roman" panose="02020603050405020304" pitchFamily="18" charset="0"/>
               </a:rPr>
-              <a:t>40000</a:t>
+              <a:t>1000000</a:t>
             </a:r>
             <a:r>
               <a:rPr lang="zh-CN" altLang="zh-CN" sz="1800" kern="100" dirty="0">
@@ -5937,9 +5937,55 @@
           </a:p>
         </p:txBody>
       </p:sp>
+      <p:sp>
+        <p:nvSpPr>
+          <p:cNvPr id="10" name="文本框 9"/>
+          <p:cNvSpPr txBox="1"/>
+          <p:nvPr/>
+        </p:nvSpPr>
+        <p:spPr>
+          <a:xfrm>
+            <a:off x="433705" y="324792"/>
+            <a:ext cx="2000816" cy="583565"/>
+          </a:xfrm>
+          <a:prstGeom prst="rect">
+            <a:avLst/>
+          </a:prstGeom>
+          <a:noFill/>
+        </p:spPr>
+        <p:txBody>
+          <a:bodyPr wrap="square">
+            <a:spAutoFit/>
+          </a:bodyPr>
+          <a:lstStyle/>
+          <a:p>
+            <a:r>
+              <a:rPr lang="zh-CN" altLang="en-US" sz="3200" b="1" dirty="0">
+                <a:solidFill>
+                  <a:schemeClr val="accent1">
+                    <a:lumMod val="75000"/>
+                  </a:schemeClr>
+                </a:solidFill>
+                <a:latin typeface="Arial" panose="020B0604020202020204" pitchFamily="34" charset="0"/>
+                <a:cs typeface="Arial" panose="020B0604020202020204" pitchFamily="34" charset="0"/>
+              </a:rPr>
+              <a:t>第一题</a:t>
+            </a:r>
+            <a:endParaRPr lang="zh-CN" altLang="en-US" sz="3200" b="1" dirty="0">
+              <a:solidFill>
+                <a:schemeClr val="accent1">
+                  <a:lumMod val="75000"/>
+                </a:schemeClr>
+              </a:solidFill>
+              <a:latin typeface="Arial" panose="020B0604020202020204" pitchFamily="34" charset="0"/>
+              <a:cs typeface="Arial" panose="020B0604020202020204" pitchFamily="34" charset="0"/>
+            </a:endParaRPr>
+          </a:p>
+        </p:txBody>
+      </p:sp>
       <p:pic>
         <p:nvPicPr>
-          <p:cNvPr id="3" name="图片 2"/>
+          <p:cNvPr id="2" name="图片 1"/>
           <p:cNvPicPr>
             <a:picLocks noChangeAspect="1"/>
           </p:cNvPicPr>
@@ -5953,60 +5999,14 @@
         </p:blipFill>
         <p:spPr>
           <a:xfrm>
-            <a:off x="0" y="1778000"/>
-            <a:ext cx="12192000" cy="5080000"/>
+            <a:off x="658495" y="1934210"/>
+            <a:ext cx="10472420" cy="4363720"/>
           </a:xfrm>
           <a:prstGeom prst="rect">
             <a:avLst/>
           </a:prstGeom>
         </p:spPr>
       </p:pic>
-      <p:sp>
-        <p:nvSpPr>
-          <p:cNvPr id="10" name="文本框 9"/>
-          <p:cNvSpPr txBox="1"/>
-          <p:nvPr/>
-        </p:nvSpPr>
-        <p:spPr>
-          <a:xfrm>
-            <a:off x="433705" y="324792"/>
-            <a:ext cx="2000816" cy="583565"/>
-          </a:xfrm>
-          <a:prstGeom prst="rect">
-            <a:avLst/>
-          </a:prstGeom>
-          <a:noFill/>
-        </p:spPr>
-        <p:txBody>
-          <a:bodyPr wrap="square">
-            <a:spAutoFit/>
-          </a:bodyPr>
-          <a:lstStyle/>
-          <a:p>
-            <a:r>
-              <a:rPr lang="zh-CN" altLang="en-US" sz="3200" b="1" dirty="0">
-                <a:solidFill>
-                  <a:schemeClr val="accent1">
-                    <a:lumMod val="75000"/>
-                  </a:schemeClr>
-                </a:solidFill>
-                <a:latin typeface="Arial" panose="020B0604020202020204" pitchFamily="34" charset="0"/>
-                <a:cs typeface="Arial" panose="020B0604020202020204" pitchFamily="34" charset="0"/>
-              </a:rPr>
-              <a:t>第一题</a:t>
-            </a:r>
-            <a:endParaRPr lang="zh-CN" altLang="en-US" sz="3200" b="1" dirty="0">
-              <a:solidFill>
-                <a:schemeClr val="accent1">
-                  <a:lumMod val="75000"/>
-                </a:schemeClr>
-              </a:solidFill>
-              <a:latin typeface="Arial" panose="020B0604020202020204" pitchFamily="34" charset="0"/>
-              <a:cs typeface="Arial" panose="020B0604020202020204" pitchFamily="34" charset="0"/>
-            </a:endParaRPr>
-          </a:p>
-        </p:txBody>
-      </p:sp>
     </p:spTree>
   </p:cSld>
   <p:clrMapOvr>
@@ -6032,9 +6032,67 @@
           <a:chExt cx="0" cy="0"/>
         </a:xfrm>
       </p:grpSpPr>
+      <p:sp>
+        <p:nvSpPr>
+          <p:cNvPr id="9" name="文本框 8"/>
+          <p:cNvSpPr txBox="1"/>
+          <p:nvPr/>
+        </p:nvSpPr>
+        <p:spPr>
+          <a:xfrm>
+            <a:off x="433705" y="324792"/>
+            <a:ext cx="2000816" cy="583565"/>
+          </a:xfrm>
+          <a:prstGeom prst="rect">
+            <a:avLst/>
+          </a:prstGeom>
+          <a:noFill/>
+        </p:spPr>
+        <p:txBody>
+          <a:bodyPr wrap="square">
+            <a:spAutoFit/>
+          </a:bodyPr>
+          <a:lstStyle/>
+          <a:p>
+            <a:r>
+              <a:rPr lang="zh-CN" altLang="en-US" sz="3200" b="1" dirty="0">
+                <a:solidFill>
+                  <a:schemeClr val="accent1">
+                    <a:lumMod val="75000"/>
+                  </a:schemeClr>
+                </a:solidFill>
+                <a:latin typeface="Arial" panose="020B0604020202020204" pitchFamily="34" charset="0"/>
+                <a:cs typeface="Arial" panose="020B0604020202020204" pitchFamily="34" charset="0"/>
+              </a:rPr>
+              <a:t>参数</a:t>
+            </a:r>
+            <a:r>
+              <a:rPr lang="zh-CN" altLang="en-US" sz="3200" b="1" dirty="0">
+                <a:solidFill>
+                  <a:schemeClr val="accent1">
+                    <a:lumMod val="75000"/>
+                  </a:schemeClr>
+                </a:solidFill>
+                <a:latin typeface="Arial" panose="020B0604020202020204" pitchFamily="34" charset="0"/>
+                <a:cs typeface="Arial" panose="020B0604020202020204" pitchFamily="34" charset="0"/>
+              </a:rPr>
+              <a:t>设置</a:t>
+            </a:r>
+            <a:endParaRPr lang="zh-CN" altLang="en-US" sz="3200" b="1" dirty="0">
+              <a:solidFill>
+                <a:schemeClr val="accent1">
+                  <a:lumMod val="75000"/>
+                </a:schemeClr>
+              </a:solidFill>
+              <a:latin typeface="Arial" panose="020B0604020202020204" pitchFamily="34" charset="0"/>
+              <a:cs typeface="Arial" panose="020B0604020202020204" pitchFamily="34" charset="0"/>
+            </a:endParaRPr>
+          </a:p>
+        </p:txBody>
+      </p:sp>
       <p:pic>
         <p:nvPicPr>
-          <p:cNvPr id="8" name="图片 7"/>
+          <p:cNvPr id="3" name="图片 2"/>
           <p:cNvPicPr>
             <a:picLocks noChangeAspect="1"/>
           </p:cNvPicPr>
@@ -6048,72 +6106,14 @@
         </p:blipFill>
         <p:spPr>
           <a:xfrm>
-            <a:off x="1755140" y="1228725"/>
-            <a:ext cx="8423910" cy="5120005"/>
+            <a:off x="1851660" y="955675"/>
+            <a:ext cx="8610600" cy="5233670"/>
           </a:xfrm>
           <a:prstGeom prst="rect">
             <a:avLst/>
           </a:prstGeom>
         </p:spPr>
       </p:pic>
-      <p:sp>
-        <p:nvSpPr>
-          <p:cNvPr id="9" name="文本框 8"/>
-          <p:cNvSpPr txBox="1"/>
-          <p:nvPr/>
-        </p:nvSpPr>
-        <p:spPr>
-          <a:xfrm>
-            <a:off x="433705" y="324792"/>
-            <a:ext cx="2000816" cy="583565"/>
-          </a:xfrm>
-          <a:prstGeom prst="rect">
-            <a:avLst/>
-          </a:prstGeom>
-          <a:noFill/>
-        </p:spPr>
-        <p:txBody>
-          <a:bodyPr wrap="square">
-            <a:spAutoFit/>
-          </a:bodyPr>
-          <a:lstStyle/>
-          <a:p>
-            <a:r>
-              <a:rPr lang="zh-CN" altLang="en-US" sz="3200" b="1" dirty="0">
-                <a:solidFill>
-                  <a:schemeClr val="accent1">
-                    <a:lumMod val="75000"/>
-                  </a:schemeClr>
-                </a:solidFill>
-                <a:latin typeface="Arial" panose="020B0604020202020204" pitchFamily="34" charset="0"/>
-                <a:cs typeface="Arial" panose="020B0604020202020204" pitchFamily="34" charset="0"/>
-              </a:rPr>
-              <a:t>参数</a:t>
-            </a:r>
-            <a:r>
-              <a:rPr lang="zh-CN" altLang="en-US" sz="3200" b="1" dirty="0">
-                <a:solidFill>
-                  <a:schemeClr val="accent1">
-                    <a:lumMod val="75000"/>
-                  </a:schemeClr>
-                </a:solidFill>
-                <a:latin typeface="Arial" panose="020B0604020202020204" pitchFamily="34" charset="0"/>
-                <a:cs typeface="Arial" panose="020B0604020202020204" pitchFamily="34" charset="0"/>
-              </a:rPr>
-              <a:t>设置</a:t>
-            </a:r>
-            <a:endParaRPr lang="zh-CN" altLang="en-US" sz="3200" b="1" dirty="0">
-              <a:solidFill>
-                <a:schemeClr val="accent1">
-                  <a:lumMod val="75000"/>
-                </a:schemeClr>
-              </a:solidFill>
-              <a:latin typeface="Arial" panose="020B0604020202020204" pitchFamily="34" charset="0"/>
-              <a:cs typeface="Arial" panose="020B0604020202020204" pitchFamily="34" charset="0"/>
-            </a:endParaRPr>
-          </a:p>
-        </p:txBody>
-      </p:sp>
     </p:spTree>
   </p:cSld>
   <p:clrMapOvr>
@@ -6281,7 +6281,7 @@
             <p:spPr>
               <a:xfrm>
                 <a:off x="495677" y="893658"/>
-                <a:ext cx="10377535" cy="646331"/>
+                <a:ext cx="10377535" cy="654685"/>
               </a:xfrm>
               <a:prstGeom prst="rect">
                 <a:avLst/>
@@ -6313,7 +6313,7 @@
                 </a:r>
                 <a:r>
                   <a:rPr lang="en-US" altLang="zh-CN" dirty="0"/>
-                  <a:t>20*20</a:t>
+                  <a:t>100*100</a:t>
                 </a:r>
                 <a:r>
                   <a:rPr lang="zh-CN" altLang="zh-CN" dirty="0"/>
@@ -6379,12 +6379,34 @@
                           </a:rPr>
                           <m:t>+</m:t>
                         </m:r>
-                        <m:r>
-                          <a:rPr lang="en-US" altLang="zh-CN">
-                            <a:latin typeface="Cambria Math" panose="02040503050406030204" pitchFamily="18" charset="0"/>
-                          </a:rPr>
-                          <m:t>𝑗</m:t>
-                        </m:r>
+                        <m:sSup>
+                          <m:sSupPr>
+                            <m:ctrlPr>
+                              <a:rPr lang="en-US" altLang="zh-CN" i="1">
+                                <a:latin typeface="Cambria Math" panose="02040503050406030204" pitchFamily="18" charset="0"/>
+                                <a:cs typeface="Cambria Math" panose="02040503050406030204" pitchFamily="18" charset="0"/>
+                              </a:rPr>
+                            </m:ctrlPr>
+                          </m:sSupPr>
+                          <m:e>
+                            <m:r>
+                              <a:rPr lang="en-US" altLang="zh-CN" i="1">
+                                <a:latin typeface="Cambria Math" panose="02040503050406030204" pitchFamily="18" charset="0"/>
+                                <a:cs typeface="Cambria Math" panose="02040503050406030204" pitchFamily="18" charset="0"/>
+                              </a:rPr>
+                              <m:t>𝑗</m:t>
+                            </m:r>
+                          </m:e>
+                          <m:sup>
+                            <m:r>
+                              <a:rPr lang="en-US" altLang="zh-CN" i="1">
+                                <a:latin typeface="Cambria Math" panose="02040503050406030204" pitchFamily="18" charset="0"/>
+                                <a:cs typeface="Cambria Math" panose="02040503050406030204" pitchFamily="18" charset="0"/>
+                              </a:rPr>
+                              <m:t>2</m:t>
+                            </m:r>
+                          </m:sup>
+                        </m:sSup>
                       </m:e>
                     </m:d>
                   </m:oMath>
@@ -6423,55 +6445,78 @@
                 </a:r>
                 <a:r>
                   <a:rPr lang="zh-CN" altLang="zh-CN" dirty="0"/>
-                  <a:t>方向的网格点序号，编程求粒子在（</a:t>
+                  <a:t>方向的网格点序号，编程求粒子在</a:t>
                 </a:r>
-                <a:r>
-                  <a:rPr lang="en-US" altLang="zh-CN" dirty="0"/>
-                  <a:t>35.5</a:t>
-                </a:r>
+                <a14:m>
+                  <m:oMath xmlns:m="http://schemas.openxmlformats.org/officeDocument/2006/math">
+                    <m:r>
+                      <a:rPr lang="en-US" altLang="zh-CN" i="1" dirty="0">
+                        <a:latin typeface="Cambria Math" panose="02040503050406030204" pitchFamily="18" charset="0"/>
+                        <a:cs typeface="Cambria Math" panose="02040503050406030204" pitchFamily="18" charset="0"/>
+                      </a:rPr>
+                      <m:t>(</m:t>
+                    </m:r>
+                    <m:r>
+                      <a:rPr lang="en-US" altLang="zh-CN" i="1" dirty="0">
+                        <a:latin typeface="Cambria Math" panose="02040503050406030204" pitchFamily="18" charset="0"/>
+                        <a:cs typeface="Cambria Math" panose="02040503050406030204" pitchFamily="18" charset="0"/>
+                      </a:rPr>
+                      <m:t>7</m:t>
+                    </m:r>
+                    <m:r>
+                      <a:rPr lang="en-US" altLang="zh-CN" i="1" dirty="0">
+                        <a:latin typeface="Cambria Math" panose="02040503050406030204" pitchFamily="18" charset="0"/>
+                        <a:cs typeface="Cambria Math" panose="02040503050406030204" pitchFamily="18" charset="0"/>
+                      </a:rPr>
+                      <m:t>.</m:t>
+                    </m:r>
+                    <m:r>
+                      <a:rPr lang="en-US" altLang="zh-CN" i="1" dirty="0">
+                        <a:latin typeface="Cambria Math" panose="02040503050406030204" pitchFamily="18" charset="0"/>
+                        <a:cs typeface="Cambria Math" panose="02040503050406030204" pitchFamily="18" charset="0"/>
+                      </a:rPr>
+                      <m:t>8</m:t>
+                    </m:r>
+                    <m:r>
+                      <a:rPr lang="en-US" altLang="zh-CN" i="1" dirty="0">
+                        <a:latin typeface="Cambria Math" panose="02040503050406030204" pitchFamily="18" charset="0"/>
+                        <a:cs typeface="Cambria Math" panose="02040503050406030204" pitchFamily="18" charset="0"/>
+                      </a:rPr>
+                      <m:t>, </m:t>
+                    </m:r>
+                    <m:r>
+                      <a:rPr lang="en-US" altLang="zh-CN" i="1" dirty="0">
+                        <a:latin typeface="Cambria Math" panose="02040503050406030204" pitchFamily="18" charset="0"/>
+                        <a:cs typeface="Cambria Math" panose="02040503050406030204" pitchFamily="18" charset="0"/>
+                      </a:rPr>
+                      <m:t>9</m:t>
+                    </m:r>
+                    <m:r>
+                      <a:rPr lang="en-US" altLang="zh-CN" i="1" dirty="0">
+                        <a:latin typeface="Cambria Math" panose="02040503050406030204" pitchFamily="18" charset="0"/>
+                        <a:cs typeface="Cambria Math" panose="02040503050406030204" pitchFamily="18" charset="0"/>
+                      </a:rPr>
+                      <m:t>.</m:t>
+                    </m:r>
+                    <m:r>
+                      <a:rPr lang="en-US" altLang="zh-CN" i="1" dirty="0">
+                        <a:latin typeface="Cambria Math" panose="02040503050406030204" pitchFamily="18" charset="0"/>
+                        <a:cs typeface="Cambria Math" panose="02040503050406030204" pitchFamily="18" charset="0"/>
+                      </a:rPr>
+                      <m:t>5</m:t>
+                    </m:r>
+                    <m:r>
+                      <a:rPr lang="en-US" altLang="zh-CN" i="1" dirty="0">
+                        <a:latin typeface="Cambria Math" panose="02040503050406030204" pitchFamily="18" charset="0"/>
+                        <a:cs typeface="Cambria Math" panose="02040503050406030204" pitchFamily="18" charset="0"/>
+                      </a:rPr>
+                      <m:t>)</m:t>
+                    </m:r>
+                  </m:oMath>
+                </a14:m>
                 <a:r>
                   <a:rPr lang="zh-CN" altLang="zh-CN" dirty="0"/>
-                  <a:t>，</a:t>
-                </a:r>
-                <a:r>
-                  <a:rPr lang="en-US" altLang="zh-CN" dirty="0"/>
-                  <a:t>45.6</a:t>
-                </a:r>
-                <a:r>
-                  <a:rPr lang="zh-CN" altLang="zh-CN" dirty="0"/>
-                  <a:t>），（</a:t>
-                </a:r>
-                <a:r>
-                  <a:rPr lang="en-US" altLang="zh-CN" dirty="0"/>
-                  <a:t>38.1</a:t>
-                </a:r>
-                <a:r>
-                  <a:rPr lang="zh-CN" altLang="zh-CN" dirty="0"/>
-                  <a:t>，</a:t>
-                </a:r>
-                <a:r>
-                  <a:rPr lang="en-US" altLang="zh-CN" dirty="0"/>
-                  <a:t>58.8</a:t>
-                </a:r>
-                <a:r>
-                  <a:rPr lang="zh-CN" altLang="zh-CN" dirty="0"/>
-                  <a:t>）和（</a:t>
-                </a:r>
-                <a:r>
-                  <a:rPr lang="en-US" altLang="zh-CN" dirty="0"/>
-                  <a:t>78.7</a:t>
-                </a:r>
-                <a:r>
-                  <a:rPr lang="zh-CN" altLang="zh-CN" dirty="0"/>
-                  <a:t>，</a:t>
-                </a:r>
-                <a:r>
-                  <a:rPr lang="en-US" altLang="zh-CN" dirty="0"/>
-                  <a:t>65.7</a:t>
-                </a:r>
-                <a:r>
-                  <a:rPr lang="zh-CN" altLang="zh-CN" dirty="0"/>
-                  <a:t>）处电场。</a:t>
+                  <a:t>处电场。</a:t>
                 </a:r>
                 <a:endParaRPr lang="zh-CN" altLang="zh-CN" dirty="0"/>
               </a:p>
@@ -6490,7 +6535,7 @@
             <p:spPr>
               <a:xfrm>
                 <a:off x="495677" y="893658"/>
-                <a:ext cx="10377535" cy="646331"/>
+                <a:ext cx="10377535" cy="654685"/>
               </a:xfrm>
               <a:prstGeom prst="rect">
                 <a:avLst/>
@@ -6498,7 +6543,7 @@
               <a:blipFill rotWithShape="1">
                 <a:blip r:embed="rId1"/>
                 <a:stretch>
-                  <a:fillRect l="-4" t="-33" r="1" b="18"/>
+                  <a:fillRect l="-4" t="-33" r="1" b="33"/>
                 </a:stretch>
               </a:blipFill>
             </p:spPr>
@@ -6517,384 +6562,103 @@
           </p:sp>
         </mc:Fallback>
       </mc:AlternateContent>
-      <mc:AlternateContent xmlns:mc="http://schemas.openxmlformats.org/markup-compatibility/2006">
-        <mc:Choice xmlns:a14="http://schemas.microsoft.com/office/drawing/2010/main" Requires="a14">
-          <p:sp>
-            <p:nvSpPr>
-              <p:cNvPr id="5" name="文本框 4"/>
-              <p:cNvSpPr txBox="1"/>
-              <p:nvPr/>
-            </p:nvSpPr>
-            <p:spPr>
-              <a:xfrm>
-                <a:off x="7683500" y="2639060"/>
-                <a:ext cx="3242310" cy="1198880"/>
-              </a:xfrm>
-              <a:prstGeom prst="rect">
-                <a:avLst/>
-              </a:prstGeom>
-              <a:noFill/>
-            </p:spPr>
-            <p:txBody>
-              <a:bodyPr wrap="square">
-                <a:spAutoFit/>
-              </a:bodyPr>
-              <a:lstStyle/>
-              <a:p>
-                <a:r>
-                  <a:rPr lang="zh-CN" altLang="en-US" dirty="0"/>
-                  <a:t>结果：</a:t>
-                </a:r>
-                <a:endParaRPr lang="en-US" altLang="zh-CN" dirty="0"/>
-              </a:p>
-              <a:p>
-                <a:r>
-                  <a:rPr lang="zh-CN" altLang="zh-CN" dirty="0"/>
-                  <a:t>（</a:t>
-                </a:r>
-                <a:r>
-                  <a:rPr lang="en-US" altLang="zh-CN" dirty="0"/>
-                  <a:t>35.5</a:t>
-                </a:r>
-                <a:r>
-                  <a:rPr lang="zh-CN" altLang="zh-CN" dirty="0"/>
-                  <a:t>，</a:t>
-                </a:r>
-                <a:r>
-                  <a:rPr lang="en-US" altLang="zh-CN" dirty="0"/>
-                  <a:t>45.6</a:t>
-                </a:r>
-                <a:r>
-                  <a:rPr lang="zh-CN" altLang="zh-CN" dirty="0"/>
-                  <a:t>）</a:t>
-                </a:r>
-                <a:r>
-                  <a:rPr lang="en-US" altLang="zh-CN" dirty="0"/>
-                  <a:t> </a:t>
-                </a:r>
-                <a:r>
-                  <a:rPr lang="zh-CN" altLang="en-US" dirty="0"/>
-                  <a:t>：</a:t>
-                </a:r>
-                <a:r>
-                  <a:rPr lang="en-US" altLang="zh-CN" dirty="0"/>
-                  <a:t> </a:t>
-                </a:r>
-                <a14:m>
-                  <m:oMath xmlns:m="http://schemas.openxmlformats.org/officeDocument/2006/math">
-                    <m:sSub>
-                      <m:sSubPr>
-                        <m:ctrlPr>
-                          <a:rPr lang="zh-CN" altLang="zh-CN" i="1" smtClean="0">
-                            <a:latin typeface="Cambria Math" panose="02040503050406030204" pitchFamily="18" charset="0"/>
-                          </a:rPr>
-                        </m:ctrlPr>
-                      </m:sSubPr>
-                      <m:e>
-                        <m:r>
-                          <m:rPr>
-                            <m:sty m:val="p"/>
-                          </m:rPr>
-                          <a:rPr lang="en-US" altLang="zh-CN">
-                            <a:latin typeface="Cambria Math" panose="02040503050406030204" pitchFamily="18" charset="0"/>
-                          </a:rPr>
-                          <m:t>E</m:t>
-                        </m:r>
-                      </m:e>
-                      <m:sub>
-                        <m:r>
-                          <m:rPr>
-                            <m:sty m:val="p"/>
-                          </m:rPr>
-                          <a:rPr lang="en-US" altLang="zh-CN">
-                            <a:latin typeface="Cambria Math" panose="02040503050406030204" pitchFamily="18" charset="0"/>
-                          </a:rPr>
-                          <m:t>x</m:t>
-                        </m:r>
-                      </m:sub>
-                    </m:sSub>
-                    <m:r>
-                      <a:rPr lang="en-US" altLang="zh-CN">
-                        <a:latin typeface="Cambria Math" panose="02040503050406030204" pitchFamily="18" charset="0"/>
-                      </a:rPr>
-                      <m:t>=</m:t>
-                    </m:r>
-                    <m:r>
-                      <a:rPr lang="en-US" altLang="zh-CN" b="0" i="1" smtClean="0">
-                        <a:latin typeface="Cambria Math" panose="02040503050406030204" pitchFamily="18" charset="0"/>
-                      </a:rPr>
-                      <m:t>16</m:t>
-                    </m:r>
-                    <m:r>
-                      <a:rPr lang="en-US" altLang="zh-CN" b="0" i="1" smtClean="0">
-                        <a:latin typeface="Cambria Math" panose="02040503050406030204" pitchFamily="18" charset="0"/>
-                      </a:rPr>
-                      <m:t>.</m:t>
-                    </m:r>
-                    <m:r>
-                      <a:rPr lang="en-US" altLang="zh-CN" b="0" i="1" smtClean="0">
-                        <a:latin typeface="Cambria Math" panose="02040503050406030204" pitchFamily="18" charset="0"/>
-                      </a:rPr>
-                      <m:t>22</m:t>
-                    </m:r>
-                  </m:oMath>
-                </a14:m>
-                <a:endParaRPr lang="en-US" altLang="zh-CN" dirty="0"/>
-              </a:p>
-              <a:p>
-                <a:r>
-                  <a:rPr lang="zh-CN" altLang="zh-CN" dirty="0"/>
-                  <a:t>（</a:t>
-                </a:r>
-                <a:r>
-                  <a:rPr lang="en-US" altLang="zh-CN" dirty="0"/>
-                  <a:t>38.1</a:t>
-                </a:r>
-                <a:r>
-                  <a:rPr lang="zh-CN" altLang="zh-CN" dirty="0"/>
-                  <a:t>，</a:t>
-                </a:r>
-                <a:r>
-                  <a:rPr lang="en-US" altLang="zh-CN" dirty="0"/>
-                  <a:t>58.8</a:t>
-                </a:r>
-                <a:r>
-                  <a:rPr lang="zh-CN" altLang="zh-CN" dirty="0"/>
-                  <a:t>）</a:t>
-                </a:r>
-                <a:r>
-                  <a:rPr lang="en-US" altLang="zh-CN" dirty="0"/>
-                  <a:t> </a:t>
-                </a:r>
-                <a:r>
-                  <a:rPr lang="zh-CN" altLang="en-US" dirty="0"/>
-                  <a:t>：</a:t>
-                </a:r>
-                <a:r>
-                  <a:rPr lang="en-US" altLang="zh-CN" dirty="0"/>
-                  <a:t> </a:t>
-                </a:r>
-                <a14:m>
-                  <m:oMath xmlns:m="http://schemas.openxmlformats.org/officeDocument/2006/math">
-                    <m:sSub>
-                      <m:sSubPr>
-                        <m:ctrlPr>
-                          <a:rPr lang="zh-CN" altLang="zh-CN" i="1" smtClean="0">
-                            <a:latin typeface="Cambria Math" panose="02040503050406030204" pitchFamily="18" charset="0"/>
-                          </a:rPr>
-                        </m:ctrlPr>
-                      </m:sSubPr>
-                      <m:e>
-                        <m:r>
-                          <m:rPr>
-                            <m:sty m:val="p"/>
-                          </m:rPr>
-                          <a:rPr lang="en-US" altLang="zh-CN">
-                            <a:latin typeface="Cambria Math" panose="02040503050406030204" pitchFamily="18" charset="0"/>
-                          </a:rPr>
-                          <m:t>E</m:t>
-                        </m:r>
-                      </m:e>
-                      <m:sub>
-                        <m:r>
-                          <m:rPr>
-                            <m:sty m:val="p"/>
-                          </m:rPr>
-                          <a:rPr lang="en-US" altLang="zh-CN">
-                            <a:latin typeface="Cambria Math" panose="02040503050406030204" pitchFamily="18" charset="0"/>
-                          </a:rPr>
-                          <m:t>x</m:t>
-                        </m:r>
-                      </m:sub>
-                    </m:sSub>
-                    <m:r>
-                      <a:rPr lang="en-US" altLang="zh-CN">
-                        <a:latin typeface="Cambria Math" panose="02040503050406030204" pitchFamily="18" charset="0"/>
-                      </a:rPr>
-                      <m:t>=</m:t>
-                    </m:r>
-                    <m:r>
-                      <a:rPr lang="en-US" altLang="zh-CN" b="0" i="1" smtClean="0">
-                        <a:latin typeface="Cambria Math" panose="02040503050406030204" pitchFamily="18" charset="0"/>
-                      </a:rPr>
-                      <m:t>19</m:t>
-                    </m:r>
-                    <m:r>
-                      <a:rPr lang="en-US" altLang="zh-CN" b="0" i="1" smtClean="0">
-                        <a:latin typeface="Cambria Math" panose="02040503050406030204" pitchFamily="18" charset="0"/>
-                      </a:rPr>
-                      <m:t>.</m:t>
-                    </m:r>
-                    <m:r>
-                      <a:rPr lang="en-US" altLang="zh-CN" b="0" i="1" smtClean="0">
-                        <a:latin typeface="Cambria Math" panose="02040503050406030204" pitchFamily="18" charset="0"/>
-                      </a:rPr>
-                      <m:t>38</m:t>
-                    </m:r>
-                  </m:oMath>
-                </a14:m>
-                <a:endParaRPr lang="en-US" altLang="zh-CN" dirty="0"/>
-              </a:p>
-              <a:p>
-                <a:r>
-                  <a:rPr lang="zh-CN" altLang="zh-CN" dirty="0"/>
-                  <a:t>（</a:t>
-                </a:r>
-                <a:r>
-                  <a:rPr lang="en-US" altLang="zh-CN" dirty="0"/>
-                  <a:t>78.7</a:t>
-                </a:r>
-                <a:r>
-                  <a:rPr lang="zh-CN" altLang="zh-CN" dirty="0"/>
-                  <a:t>，</a:t>
-                </a:r>
-                <a:r>
-                  <a:rPr lang="en-US" altLang="zh-CN" dirty="0"/>
-                  <a:t>65.7</a:t>
-                </a:r>
-                <a:r>
-                  <a:rPr lang="zh-CN" altLang="zh-CN" dirty="0"/>
-                  <a:t>）</a:t>
-                </a:r>
-                <a:r>
-                  <a:rPr lang="en-US" altLang="zh-CN" dirty="0"/>
-                  <a:t> </a:t>
-                </a:r>
-                <a:r>
-                  <a:rPr lang="zh-CN" altLang="en-US" dirty="0"/>
-                  <a:t>：</a:t>
-                </a:r>
-                <a:r>
-                  <a:rPr lang="en-US" altLang="zh-CN" dirty="0"/>
-                  <a:t> </a:t>
-                </a:r>
-                <a14:m>
-                  <m:oMath xmlns:m="http://schemas.openxmlformats.org/officeDocument/2006/math">
-                    <m:sSub>
-                      <m:sSubPr>
-                        <m:ctrlPr>
-                          <a:rPr lang="zh-CN" altLang="zh-CN" i="1" smtClean="0">
-                            <a:latin typeface="Cambria Math" panose="02040503050406030204" pitchFamily="18" charset="0"/>
-                          </a:rPr>
-                        </m:ctrlPr>
-                      </m:sSubPr>
-                      <m:e>
-                        <m:r>
-                          <m:rPr>
-                            <m:sty m:val="p"/>
-                          </m:rPr>
-                          <a:rPr lang="en-US" altLang="zh-CN">
-                            <a:latin typeface="Cambria Math" panose="02040503050406030204" pitchFamily="18" charset="0"/>
-                          </a:rPr>
-                          <m:t>E</m:t>
-                        </m:r>
-                      </m:e>
-                      <m:sub>
-                        <m:r>
-                          <m:rPr>
-                            <m:sty m:val="p"/>
-                          </m:rPr>
-                          <a:rPr lang="en-US" altLang="zh-CN">
-                            <a:latin typeface="Cambria Math" panose="02040503050406030204" pitchFamily="18" charset="0"/>
-                          </a:rPr>
-                          <m:t>x</m:t>
-                        </m:r>
-                      </m:sub>
-                    </m:sSub>
-                    <m:r>
-                      <a:rPr lang="en-US" altLang="zh-CN">
-                        <a:latin typeface="Cambria Math" panose="02040503050406030204" pitchFamily="18" charset="0"/>
-                      </a:rPr>
-                      <m:t>=</m:t>
-                    </m:r>
-                    <m:r>
-                      <a:rPr lang="en-US" altLang="zh-CN" i="1" smtClean="0">
-                        <a:latin typeface="Cambria Math" panose="02040503050406030204" pitchFamily="18" charset="0"/>
-                      </a:rPr>
-                      <m:t>28</m:t>
-                    </m:r>
-                    <m:r>
-                      <a:rPr lang="en-US" altLang="zh-CN" i="1" smtClean="0">
-                        <a:latin typeface="Cambria Math" panose="02040503050406030204" pitchFamily="18" charset="0"/>
-                      </a:rPr>
-                      <m:t>.</m:t>
-                    </m:r>
-                    <m:r>
-                      <a:rPr lang="en-US" altLang="zh-CN" i="1" smtClean="0">
-                        <a:latin typeface="Cambria Math" panose="02040503050406030204" pitchFamily="18" charset="0"/>
-                      </a:rPr>
-                      <m:t>88</m:t>
-                    </m:r>
-                  </m:oMath>
-                </a14:m>
-                <a:endParaRPr lang="en-US" altLang="zh-CN" dirty="0"/>
-              </a:p>
-            </p:txBody>
-          </p:sp>
-        </mc:Choice>
-        <mc:Fallback>
-          <p:sp>
-            <p:nvSpPr>
-              <p:cNvPr id="5" name="文本框 4"/>
-              <p:cNvSpPr txBox="1">
-                <a:spLocks noRot="1" noChangeAspect="1" noMove="1" noResize="1" noEditPoints="1" noAdjustHandles="1" noChangeArrowheads="1" noChangeShapeType="1" noTextEdit="1"/>
-              </p:cNvSpPr>
-              <p:nvPr/>
-            </p:nvSpPr>
-            <p:spPr>
-              <a:xfrm>
-                <a:off x="7683500" y="2639060"/>
-                <a:ext cx="3242310" cy="1198880"/>
-              </a:xfrm>
-              <a:prstGeom prst="rect">
-                <a:avLst/>
-              </a:prstGeom>
-              <a:blipFill rotWithShape="1">
-                <a:blip r:embed="rId2"/>
-                <a:stretch>
-                  <a:fillRect/>
-                </a:stretch>
-              </a:blipFill>
-            </p:spPr>
-            <p:txBody>
-              <a:bodyPr/>
-              <a:lstStyle/>
-              <a:p>
-                <a:r>
-                  <a:rPr lang="zh-CN" altLang="en-US">
-                    <a:noFill/>
-                  </a:rPr>
-                  <a:t> </a:t>
-                </a:r>
-              </a:p>
-            </p:txBody>
-          </p:sp>
-        </mc:Fallback>
-      </mc:AlternateContent>
-      <p:pic>
-        <p:nvPicPr>
-          <p:cNvPr id="7" name="图片 6"/>
-          <p:cNvPicPr>
-            <a:picLocks noChangeAspect="1"/>
-          </p:cNvPicPr>
+      <p:sp>
+        <p:nvSpPr>
+          <p:cNvPr id="5" name="文本框 4"/>
+          <p:cNvSpPr txBox="1"/>
           <p:nvPr/>
-        </p:nvPicPr>
-        <p:blipFill>
-          <a:blip r:embed="rId3"/>
-          <a:stretch>
-            <a:fillRect/>
-          </a:stretch>
-        </p:blipFill>
+        </p:nvSpPr>
         <p:spPr>
           <a:xfrm>
-            <a:off x="313055" y="1567180"/>
-            <a:ext cx="7054215" cy="5290820"/>
+            <a:off x="7683500" y="2639060"/>
+            <a:ext cx="3242310" cy="1753235"/>
           </a:xfrm>
           <a:prstGeom prst="rect">
             <a:avLst/>
           </a:prstGeom>
+          <a:noFill/>
         </p:spPr>
-      </p:pic>
+        <p:txBody>
+          <a:bodyPr wrap="square">
+            <a:spAutoFit/>
+          </a:bodyPr>
+          <a:lstStyle/>
+          <a:p>
+            <a:r>
+              <a:rPr lang="zh-CN" altLang="en-US" dirty="0"/>
+              <a:t>结果：</a:t>
+            </a:r>
+            <a:endParaRPr lang="en-US" altLang="zh-CN" dirty="0"/>
+          </a:p>
+          <a:p>
+            <a:r>
+              <a:rPr lang="en-US" altLang="zh-CN" dirty="0"/>
+              <a:t>  </a:t>
+            </a:r>
+            <a:r>
+              <a:rPr lang="zh-CN" altLang="en-US" dirty="0"/>
+              <a:t>一阶权重法插值结果</a:t>
+            </a:r>
+            <a:r>
+              <a:rPr lang="en-US" altLang="zh-CN" dirty="0"/>
+              <a:t>: </a:t>
+            </a:r>
+            <a:endParaRPr lang="en-US" altLang="zh-CN" dirty="0"/>
+          </a:p>
+          <a:p>
+            <a:r>
+              <a:rPr lang="en-US" altLang="zh-CN" dirty="0"/>
+              <a:t>E = 98.3000</a:t>
+            </a:r>
+            <a:endParaRPr lang="en-US" altLang="zh-CN" dirty="0"/>
+          </a:p>
+          <a:p>
+            <a:r>
+              <a:rPr lang="en-US" altLang="zh-CN" dirty="0"/>
+              <a:t>  </a:t>
+            </a:r>
+            <a:r>
+              <a:rPr lang="zh-CN" altLang="en-US" dirty="0"/>
+              <a:t>精确值</a:t>
+            </a:r>
+            <a:r>
+              <a:rPr lang="en-US" altLang="zh-CN" dirty="0"/>
+              <a:t> (E = x + y</a:t>
+            </a:r>
+            <a:r>
+              <a:rPr lang="en-US" altLang="en-US" dirty="0"/>
+              <a:t>²</a:t>
+            </a:r>
+            <a:r>
+              <a:rPr lang="en-US" altLang="zh-CN" dirty="0"/>
+              <a:t>): </a:t>
+            </a:r>
+            <a:endParaRPr lang="en-US" altLang="zh-CN" dirty="0"/>
+          </a:p>
+          <a:p>
+            <a:r>
+              <a:rPr lang="en-US" altLang="zh-CN" dirty="0"/>
+              <a:t>E = 98.0500</a:t>
+            </a:r>
+            <a:endParaRPr lang="en-US" altLang="zh-CN" dirty="0"/>
+          </a:p>
+          <a:p>
+            <a:r>
+              <a:rPr lang="en-US" altLang="zh-CN" dirty="0"/>
+              <a:t>  </a:t>
+            </a:r>
+            <a:r>
+              <a:rPr lang="zh-CN" altLang="en-US" dirty="0"/>
+              <a:t>误差</a:t>
+            </a:r>
+            <a:r>
+              <a:rPr lang="en-US" altLang="zh-CN" dirty="0"/>
+              <a:t>: 0.2500</a:t>
+            </a:r>
+            <a:endParaRPr lang="en-US" altLang="zh-CN" dirty="0"/>
+          </a:p>
+        </p:txBody>
+      </p:sp>
       <p:sp>
         <p:nvSpPr>
           <p:cNvPr id="16" name="文本框 15"/>
@@ -6953,6 +6717,30 @@
           </a:p>
         </p:txBody>
       </p:sp>
+      <p:pic>
+        <p:nvPicPr>
+          <p:cNvPr id="2" name="图片 1"/>
+          <p:cNvPicPr>
+            <a:picLocks noChangeAspect="1"/>
+          </p:cNvPicPr>
+          <p:nvPr/>
+        </p:nvPicPr>
+        <p:blipFill>
+          <a:blip r:embed="rId2"/>
+          <a:stretch>
+            <a:fillRect/>
+          </a:stretch>
+        </p:blipFill>
+        <p:spPr>
+          <a:xfrm>
+            <a:off x="433705" y="1624965"/>
+            <a:ext cx="6668770" cy="5001895"/>
+          </a:xfrm>
+          <a:prstGeom prst="rect">
+            <a:avLst/>
+          </a:prstGeom>
+        </p:spPr>
+      </p:pic>
     </p:spTree>
   </p:cSld>
   <p:clrMapOvr>
@@ -7960,7 +7748,7 @@
         <p:spPr>
           <a:xfrm>
             <a:off x="0" y="177472"/>
-            <a:ext cx="6097508" cy="584775"/>
+            <a:ext cx="6097508" cy="583565"/>
           </a:xfrm>
           <a:prstGeom prst="rect">
             <a:avLst/>
@@ -7983,7 +7771,19 @@
                 <a:latin typeface="Arial" panose="020B0604020202020204" pitchFamily="34" charset="0"/>
                 <a:cs typeface="Arial" panose="020B0604020202020204" pitchFamily="34" charset="0"/>
               </a:rPr>
-              <a:t>双线性插值方法</a:t>
+              <a:t>一阶</a:t>
+            </a:r>
+            <a:r>
+              <a:rPr lang="zh-CN" altLang="en-US" sz="3200" b="1" dirty="0">
+                <a:solidFill>
+                  <a:schemeClr val="accent1">
+                    <a:lumMod val="75000"/>
+                  </a:schemeClr>
+                </a:solidFill>
+                <a:latin typeface="Arial" panose="020B0604020202020204" pitchFamily="34" charset="0"/>
+                <a:cs typeface="Arial" panose="020B0604020202020204" pitchFamily="34" charset="0"/>
+              </a:rPr>
+              <a:t>权重法</a:t>
             </a:r>
             <a:endParaRPr lang="zh-CN" altLang="en-US" sz="3200" b="1" dirty="0">
               <a:solidFill>
@@ -8031,7 +7831,7 @@
         <p:spPr>
           <a:xfrm>
             <a:off x="0" y="177472"/>
-            <a:ext cx="6097508" cy="584775"/>
+            <a:ext cx="6097508" cy="583565"/>
           </a:xfrm>
           <a:prstGeom prst="rect">
             <a:avLst/>
@@ -8054,7 +7854,19 @@
                 <a:latin typeface="Arial" panose="020B0604020202020204" pitchFamily="34" charset="0"/>
                 <a:cs typeface="Arial" panose="020B0604020202020204" pitchFamily="34" charset="0"/>
               </a:rPr>
-              <a:t>双线性插值方法</a:t>
+              <a:t>一阶权重</a:t>
+            </a:r>
+            <a:r>
+              <a:rPr lang="zh-CN" altLang="en-US" sz="3200" b="1" dirty="0">
+                <a:solidFill>
+                  <a:schemeClr val="accent1">
+                    <a:lumMod val="75000"/>
+                  </a:schemeClr>
+                </a:solidFill>
+                <a:latin typeface="Arial" panose="020B0604020202020204" pitchFamily="34" charset="0"/>
+                <a:cs typeface="Arial" panose="020B0604020202020204" pitchFamily="34" charset="0"/>
+              </a:rPr>
+              <a:t>法</a:t>
             </a:r>
             <a:endParaRPr lang="zh-CN" altLang="en-US" sz="3200" b="1" dirty="0">
               <a:solidFill>

--- a/doc/particle_in_cell1.pptx
+++ b/doc/particle_in_cell1.pptx
@@ -7882,7 +7882,7 @@
       </p:sp>
       <p:pic>
         <p:nvPicPr>
-          <p:cNvPr id="5" name="图片 4"/>
+          <p:cNvPr id="2" name="图片 1"/>
           <p:cNvPicPr>
             <a:picLocks noChangeAspect="1"/>
           </p:cNvPicPr>
@@ -7896,8 +7896,8 @@
         </p:blipFill>
         <p:spPr>
           <a:xfrm>
-            <a:off x="1357630" y="762000"/>
-            <a:ext cx="9477375" cy="5854700"/>
+            <a:off x="2849880" y="760730"/>
+            <a:ext cx="6893560" cy="5920105"/>
           </a:xfrm>
           <a:prstGeom prst="rect">
             <a:avLst/>
